--- a/templates/Benchmark Marché/master.pptx
+++ b/templates/Benchmark Marché/master.pptx
@@ -1706,7 +1706,7 @@
                   <a:bodyPr/>
                   <a:lstStyle/>
                   <a:p>
-                    <a:fld id="{6DB9D4F8-1173-455A-9348-890F6B1409F2}" type="CELLRANGE">
+                    <a:fld id="{450C2AD7-67A1-4A9A-846F-47EC1B31306F}" type="CELLRANGE">
                       <a:rPr lang="fr-FR"/>
                       <a:pPr/>
                       <a:t>[CELLRANGE]</a:t>
@@ -1796,7 +1796,7 @@
                   <a:bodyPr/>
                   <a:lstStyle/>
                   <a:p>
-                    <a:fld id="{E9D0A0E0-A29C-4AF8-9777-9D6105605153}" type="CELLRANGE">
+                    <a:fld id="{8B620592-D38A-4F93-84E1-74BDF4E873EA}" type="CELLRANGE">
                       <a:rPr lang="fr-FR"/>
                       <a:pPr/>
                       <a:t>[CELLRANGE]</a:t>
@@ -1830,7 +1830,7 @@
                   <a:bodyPr/>
                   <a:lstStyle/>
                   <a:p>
-                    <a:fld id="{2B4CACEB-8E3C-4221-9FF0-4D7C228F5A0C}" type="CELLRANGE">
+                    <a:fld id="{6032B3C4-4280-491D-BF52-5512EAE8B574}" type="CELLRANGE">
                       <a:rPr lang="fr-FR"/>
                       <a:pPr/>
                       <a:t>[CELLRANGE]</a:t>
@@ -1864,7 +1864,7 @@
                   <a:bodyPr/>
                   <a:lstStyle/>
                   <a:p>
-                    <a:fld id="{8FE6A221-1B54-4D5E-B2D3-B26B56EFD524}" type="CELLRANGE">
+                    <a:fld id="{107EB6DA-4DD2-42E6-8116-F7CDC8F53A8D}" type="CELLRANGE">
                       <a:rPr lang="fr-FR"/>
                       <a:pPr/>
                       <a:t>[CELLRANGE]</a:t>
@@ -1898,7 +1898,7 @@
                   <a:bodyPr/>
                   <a:lstStyle/>
                   <a:p>
-                    <a:fld id="{B6855369-8F9E-43E9-92FC-2A9618DA8FB0}" type="CELLRANGE">
+                    <a:fld id="{D753D58A-6B52-4B3B-8765-D89989E401D3}" type="CELLRANGE">
                       <a:rPr lang="fr-FR"/>
                       <a:pPr/>
                       <a:t>[CELLRANGE]</a:t>
@@ -5917,7 +5917,7 @@
                   <a:bodyPr/>
                   <a:lstStyle/>
                   <a:p>
-                    <a:fld id="{9A857885-BD86-46E9-B21F-06A8B153D413}" type="CELLRANGE">
+                    <a:fld id="{46A958B6-A0FF-4BC1-9CA2-68C0A0041FF7}" type="CELLRANGE">
                       <a:rPr lang="fr-FR"/>
                       <a:pPr/>
                       <a:t>[CELLRANGE]</a:t>
@@ -5951,7 +5951,7 @@
                   <a:bodyPr/>
                   <a:lstStyle/>
                   <a:p>
-                    <a:fld id="{E9EE8E0A-B07B-45BF-9840-45573DCC2FC6}" type="CELLRANGE">
+                    <a:fld id="{5385B01F-C355-477E-A8DF-B5F6341E5473}" type="CELLRANGE">
                       <a:rPr lang="fr-FR"/>
                       <a:pPr/>
                       <a:t>[CELLRANGE]</a:t>
@@ -5985,7 +5985,7 @@
                   <a:bodyPr/>
                   <a:lstStyle/>
                   <a:p>
-                    <a:fld id="{24B7102C-A029-4AFF-A9A5-342389DC7EC3}" type="CELLRANGE">
+                    <a:fld id="{A738A365-1DD9-4D91-9011-09E23AA8EA34}" type="CELLRANGE">
                       <a:rPr lang="fr-FR"/>
                       <a:pPr/>
                       <a:t>[CELLRANGE]</a:t>
@@ -6047,7 +6047,7 @@
                   <a:bodyPr/>
                   <a:lstStyle/>
                   <a:p>
-                    <a:fld id="{B82253AB-8DFF-475A-B4C2-B6B719409E3B}" type="CELLRANGE">
+                    <a:fld id="{07C85B45-E450-4035-98E0-C12D09BF00BB}" type="CELLRANGE">
                       <a:rPr lang="fr-FR"/>
                       <a:pPr/>
                       <a:t>[CELLRANGE]</a:t>
@@ -6081,7 +6081,7 @@
                   <a:bodyPr/>
                   <a:lstStyle/>
                   <a:p>
-                    <a:fld id="{E2B5D128-5EB1-4C78-A3B0-073BD9376DF7}" type="CELLRANGE">
+                    <a:fld id="{8B65752D-1695-4ADF-8F46-2617E1B53260}" type="CELLRANGE">
                       <a:rPr lang="fr-FR"/>
                       <a:pPr/>
                       <a:t>[CELLRANGE]</a:t>
@@ -6227,7 +6227,7 @@
                   <a:bodyPr/>
                   <a:lstStyle/>
                   <a:p>
-                    <a:fld id="{1B0FEC82-E229-4ABE-90A6-397DEA17EBC5}" type="CELLRANGE">
+                    <a:fld id="{33E962D5-B01A-4C23-B7DD-1B5FC5821B03}" type="CELLRANGE">
                       <a:rPr lang="fr-FR"/>
                       <a:pPr/>
                       <a:t>[CELLRANGE]</a:t>
@@ -10746,7 +10746,7 @@
                   <a:bodyPr/>
                   <a:lstStyle/>
                   <a:p>
-                    <a:fld id="{A5C5A4E1-F26F-4F10-948C-2B6E15B2BDEF}" type="CELLRANGE">
+                    <a:fld id="{076724C6-E8A1-49DF-80E6-2C76CE6D6E9B}" type="CELLRANGE">
                       <a:rPr lang="fr-FR"/>
                       <a:pPr/>
                       <a:t>[CELLRANGE]</a:t>
@@ -10808,7 +10808,7 @@
                   <a:bodyPr/>
                   <a:lstStyle/>
                   <a:p>
-                    <a:fld id="{6ECB50DB-A8DE-4EB3-AE9E-720EF2B67F02}" type="CELLRANGE">
+                    <a:fld id="{F39D44C1-C337-42AB-A43B-6EDA7752EDF8}" type="CELLRANGE">
                       <a:rPr lang="fr-FR"/>
                       <a:pPr/>
                       <a:t>[CELLRANGE]</a:t>
@@ -10870,7 +10870,7 @@
                   <a:bodyPr/>
                   <a:lstStyle/>
                   <a:p>
-                    <a:fld id="{6A4D65E3-C049-473A-AC6A-D6DB86A5EF9D}" type="CELLRANGE">
+                    <a:fld id="{CCFF0915-5C8E-457B-9DC5-A5BCF43E3DD4}" type="CELLRANGE">
                       <a:rPr lang="fr-FR"/>
                       <a:pPr/>
                       <a:t>[CELLRANGE]</a:t>
@@ -10904,7 +10904,7 @@
                   <a:bodyPr/>
                   <a:lstStyle/>
                   <a:p>
-                    <a:fld id="{DBA8DC77-64AD-4A54-BDD6-53B6AEAB68AF}" type="CELLRANGE">
+                    <a:fld id="{E7E2B6D4-B756-4EA5-9677-45CF205371E3}" type="CELLRANGE">
                       <a:rPr lang="fr-FR"/>
                       <a:pPr/>
                       <a:t>[CELLRANGE]</a:t>
@@ -10938,7 +10938,7 @@
                   <a:bodyPr/>
                   <a:lstStyle/>
                   <a:p>
-                    <a:fld id="{163CB93E-4813-4184-B0F6-EC9C02B3B20F}" type="CELLRANGE">
+                    <a:fld id="{1A76CCC5-865E-407B-87F6-36A3536F4239}" type="CELLRANGE">
                       <a:rPr lang="fr-FR"/>
                       <a:pPr/>
                       <a:t>[CELLRANGE]</a:t>
@@ -10972,7 +10972,7 @@
                   <a:bodyPr/>
                   <a:lstStyle/>
                   <a:p>
-                    <a:fld id="{E3FE5B5E-5274-462A-98BF-EB7A1CA9DAB4}" type="CELLRANGE">
+                    <a:fld id="{4696186D-DB79-4DF2-9127-732AA6DA1AB6}" type="CELLRANGE">
                       <a:rPr lang="fr-FR"/>
                       <a:pPr/>
                       <a:t>[CELLRANGE]</a:t>
@@ -11006,7 +11006,7 @@
                   <a:bodyPr/>
                   <a:lstStyle/>
                   <a:p>
-                    <a:fld id="{405CD656-358E-4182-BA84-E284FBA4215E}" type="CELLRANGE">
+                    <a:fld id="{D2165B7D-341C-4443-84FE-48DF701903B9}" type="CELLRANGE">
                       <a:rPr lang="fr-FR"/>
                       <a:pPr/>
                       <a:t>[CELLRANGE]</a:t>
@@ -15025,7 +15025,7 @@
                   <a:bodyPr/>
                   <a:lstStyle/>
                   <a:p>
-                    <a:fld id="{DB2FC403-69C9-4C75-9E86-51ADE0F1078F}" type="CELLRANGE">
+                    <a:fld id="{334C82D2-A056-459C-8A78-98E898BA02A4}" type="CELLRANGE">
                       <a:rPr lang="fr-FR"/>
                       <a:pPr/>
                       <a:t>[CELLRANGE]</a:t>
@@ -15087,7 +15087,7 @@
                   <a:bodyPr/>
                   <a:lstStyle/>
                   <a:p>
-                    <a:fld id="{072B34E8-843D-406B-957D-C93458016D30}" type="CELLRANGE">
+                    <a:fld id="{5A3A2618-C87E-4B70-9A9F-49FBEE3F6A8D}" type="CELLRANGE">
                       <a:rPr lang="fr-FR"/>
                       <a:pPr/>
                       <a:t>[CELLRANGE]</a:t>
@@ -15149,7 +15149,7 @@
                   <a:bodyPr/>
                   <a:lstStyle/>
                   <a:p>
-                    <a:fld id="{AE5C4826-46B5-4D49-9316-4125467C3AA8}" type="CELLRANGE">
+                    <a:fld id="{CB4D0BEA-77A5-434D-8D90-A29993F199A2}" type="CELLRANGE">
                       <a:rPr lang="fr-FR"/>
                       <a:pPr/>
                       <a:t>[CELLRANGE]</a:t>
@@ -15323,7 +15323,7 @@
                   <a:bodyPr/>
                   <a:lstStyle/>
                   <a:p>
-                    <a:fld id="{209BE4E6-088A-4F03-901B-522B91B62AE1}" type="CELLRANGE">
+                    <a:fld id="{2F81F895-436B-485A-A0E4-BFD268F9EBE5}" type="CELLRANGE">
                       <a:rPr lang="fr-FR"/>
                       <a:pPr/>
                       <a:t>[CELLRANGE]</a:t>
@@ -21515,7 +21515,7 @@
           <a:p>
             <a:fld id="{C06E7438-13D2-419A-9932-DFB9ED1638C8}" type="datetimeFigureOut">
               <a:rPr lang="fr-FR" smtClean="0"/>
-              <a:t>05/10/2025</a:t>
+              <a:t>08/10/2025</a:t>
             </a:fld>
             <a:endParaRPr lang="fr-FR"/>
           </a:p>
@@ -22040,7 +22040,7 @@
           <a:p>
             <a:fld id="{58C42328-F42E-449B-81BD-CD0EDE31BD71}" type="datetimeFigureOut">
               <a:rPr lang="fr-FR" smtClean="0"/>
-              <a:t>05/10/2025</a:t>
+              <a:t>08/10/2025</a:t>
             </a:fld>
             <a:endParaRPr lang="fr-FR"/>
           </a:p>
@@ -22240,7 +22240,7 @@
           <a:p>
             <a:fld id="{58C42328-F42E-449B-81BD-CD0EDE31BD71}" type="datetimeFigureOut">
               <a:rPr lang="fr-FR" smtClean="0"/>
-              <a:t>05/10/2025</a:t>
+              <a:t>08/10/2025</a:t>
             </a:fld>
             <a:endParaRPr lang="fr-FR"/>
           </a:p>
@@ -22450,7 +22450,7 @@
           <a:p>
             <a:fld id="{58C42328-F42E-449B-81BD-CD0EDE31BD71}" type="datetimeFigureOut">
               <a:rPr lang="fr-FR" smtClean="0"/>
-              <a:t>05/10/2025</a:t>
+              <a:t>08/10/2025</a:t>
             </a:fld>
             <a:endParaRPr lang="fr-FR"/>
           </a:p>
@@ -22650,7 +22650,7 @@
           <a:p>
             <a:fld id="{58C42328-F42E-449B-81BD-CD0EDE31BD71}" type="datetimeFigureOut">
               <a:rPr lang="fr-FR" smtClean="0"/>
-              <a:t>05/10/2025</a:t>
+              <a:t>08/10/2025</a:t>
             </a:fld>
             <a:endParaRPr lang="fr-FR"/>
           </a:p>
@@ -22926,7 +22926,7 @@
           <a:p>
             <a:fld id="{58C42328-F42E-449B-81BD-CD0EDE31BD71}" type="datetimeFigureOut">
               <a:rPr lang="fr-FR" smtClean="0"/>
-              <a:t>05/10/2025</a:t>
+              <a:t>08/10/2025</a:t>
             </a:fld>
             <a:endParaRPr lang="fr-FR"/>
           </a:p>
@@ -23194,7 +23194,7 @@
           <a:p>
             <a:fld id="{58C42328-F42E-449B-81BD-CD0EDE31BD71}" type="datetimeFigureOut">
               <a:rPr lang="fr-FR" smtClean="0"/>
-              <a:t>05/10/2025</a:t>
+              <a:t>08/10/2025</a:t>
             </a:fld>
             <a:endParaRPr lang="fr-FR"/>
           </a:p>
@@ -23609,7 +23609,7 @@
           <a:p>
             <a:fld id="{58C42328-F42E-449B-81BD-CD0EDE31BD71}" type="datetimeFigureOut">
               <a:rPr lang="fr-FR" smtClean="0"/>
-              <a:t>05/10/2025</a:t>
+              <a:t>08/10/2025</a:t>
             </a:fld>
             <a:endParaRPr lang="fr-FR"/>
           </a:p>
@@ -23751,7 +23751,7 @@
           <a:p>
             <a:fld id="{58C42328-F42E-449B-81BD-CD0EDE31BD71}" type="datetimeFigureOut">
               <a:rPr lang="fr-FR" smtClean="0"/>
-              <a:t>05/10/2025</a:t>
+              <a:t>08/10/2025</a:t>
             </a:fld>
             <a:endParaRPr lang="fr-FR"/>
           </a:p>
@@ -23864,7 +23864,7 @@
           <a:p>
             <a:fld id="{58C42328-F42E-449B-81BD-CD0EDE31BD71}" type="datetimeFigureOut">
               <a:rPr lang="fr-FR" smtClean="0"/>
-              <a:t>05/10/2025</a:t>
+              <a:t>08/10/2025</a:t>
             </a:fld>
             <a:endParaRPr lang="fr-FR"/>
           </a:p>
@@ -24177,7 +24177,7 @@
           <a:p>
             <a:fld id="{58C42328-F42E-449B-81BD-CD0EDE31BD71}" type="datetimeFigureOut">
               <a:rPr lang="fr-FR" smtClean="0"/>
-              <a:t>05/10/2025</a:t>
+              <a:t>08/10/2025</a:t>
             </a:fld>
             <a:endParaRPr lang="fr-FR"/>
           </a:p>
@@ -24466,7 +24466,7 @@
           <a:p>
             <a:fld id="{58C42328-F42E-449B-81BD-CD0EDE31BD71}" type="datetimeFigureOut">
               <a:rPr lang="fr-FR" smtClean="0"/>
-              <a:t>05/10/2025</a:t>
+              <a:t>08/10/2025</a:t>
             </a:fld>
             <a:endParaRPr lang="fr-FR"/>
           </a:p>
@@ -24709,7 +24709,7 @@
           <a:p>
             <a:fld id="{58C42328-F42E-449B-81BD-CD0EDE31BD71}" type="datetimeFigureOut">
               <a:rPr lang="fr-FR" smtClean="0"/>
-              <a:t>05/10/2025</a:t>
+              <a:t>08/10/2025</a:t>
             </a:fld>
             <a:endParaRPr lang="fr-FR"/>
           </a:p>
@@ -26037,14 +26037,38 @@
           <a:lstStyle/>
           <a:p>
             <a:r>
-              <a:rPr lang="fr-FR" sz="1600" noProof="0" dirty="0">
+              <a:rPr lang="fr-FR" sz="1600" dirty="0">
                 <a:solidFill>
                   <a:schemeClr val="bg1"/>
                 </a:solidFill>
                 <a:latin typeface="Aptos" panose="020B0004020202020204" pitchFamily="34" charset="0"/>
               </a:rPr>
-              <a:t>Fiche d’identité</a:t>
+              <a:t>[</a:t>
             </a:r>
+            <a:r>
+              <a:rPr lang="fr-FR" sz="1600" dirty="0" err="1">
+                <a:solidFill>
+                  <a:schemeClr val="bg1"/>
+                </a:solidFill>
+                <a:latin typeface="Aptos" panose="020B0004020202020204" pitchFamily="34" charset="0"/>
+              </a:rPr>
+              <a:t>Code_Postal</a:t>
+            </a:r>
+            <a:r>
+              <a:rPr lang="fr-FR" sz="1600" dirty="0">
+                <a:solidFill>
+                  <a:schemeClr val="bg1"/>
+                </a:solidFill>
+                <a:latin typeface="Aptos" panose="020B0004020202020204" pitchFamily="34" charset="0"/>
+              </a:rPr>
+              <a:t>]</a:t>
+            </a:r>
+            <a:endParaRPr lang="fr-FR" sz="1600" noProof="0" dirty="0">
+              <a:solidFill>
+                <a:schemeClr val="bg1"/>
+              </a:solidFill>
+              <a:latin typeface="Aptos" panose="020B0004020202020204" pitchFamily="34" charset="0"/>
+            </a:endParaRPr>
           </a:p>
         </p:txBody>
       </p:sp>
